--- a/goblin_slides.pptx
+++ b/goblin_slides.pptx
@@ -5,7 +5,7 @@
     <p:sldMasterId id="2147483684" r:id="rId1"/>
   </p:sldMasterIdLst>
   <p:notesMasterIdLst>
-    <p:notesMasterId r:id="rId56"/>
+    <p:notesMasterId r:id="rId63"/>
   </p:notesMasterIdLst>
   <p:sldIdLst>
     <p:sldId id="256" r:id="rId2"/>
@@ -62,6 +62,13 @@
     <p:sldId id="355" r:id="rId53"/>
     <p:sldId id="300" r:id="rId54"/>
     <p:sldId id="317" r:id="rId55"/>
+    <p:sldId id="370" r:id="rId56"/>
+    <p:sldId id="371" r:id="rId57"/>
+    <p:sldId id="372" r:id="rId58"/>
+    <p:sldId id="373" r:id="rId59"/>
+    <p:sldId id="374" r:id="rId60"/>
+    <p:sldId id="375" r:id="rId61"/>
+    <p:sldId id="376" r:id="rId62"/>
   </p:sldIdLst>
   <p:sldSz cx="12192000" cy="6858000"/>
   <p:notesSz cx="6858000" cy="9144000"/>
@@ -30752,7 +30759,7 @@
                 <a:latin typeface="Source Sans Pro"/>
                 <a:ea typeface="Source Sans Pro"/>
               </a:rPr>
-              <a:t>Appendix</a:t>
+              <a:t>Structural Constraints</a:t>
             </a:r>
             <a:endParaRPr lang="en-US" sz="3600" dirty="0"/>
           </a:p>
@@ -30813,10 +30820,1845 @@
           </a:p>
         </p:txBody>
       </p:sp>
+      <p:sp>
+        <p:nvSpPr>
+          <p:cNvPr id="7" name="Content Placeholder 2">
+            <a:extLst>
+              <a:ext uri="{FF2B5EF4-FFF2-40B4-BE49-F238E27FC236}">
+                <a16:creationId xmlns:a16="http://schemas.microsoft.com/office/drawing/2014/main" id="{882EDB95-E817-BDE6-588D-14DDBC93F98B}"/>
+              </a:ext>
+            </a:extLst>
+          </p:cNvPr>
+          <p:cNvSpPr>
+            <a:spLocks noGrp="1"/>
+          </p:cNvSpPr>
+          <p:nvPr>
+            <p:ph idx="1"/>
+          </p:nvPr>
+        </p:nvSpPr>
+        <p:spPr>
+          <a:xfrm>
+            <a:off x="838200" y="1690688"/>
+            <a:ext cx="9597705" cy="5070126"/>
+          </a:xfrm>
+        </p:spPr>
+        <p:txBody>
+          <a:bodyPr vert="horz" lIns="91440" tIns="45720" rIns="91440" bIns="45720" rtlCol="0" anchor="t">
+            <a:normAutofit/>
+          </a:bodyPr>
+          <a:lstStyle/>
+          <a:p>
+            <a:pPr marL="0" indent="0">
+              <a:buNone/>
+            </a:pPr>
+            <a:r>
+              <a:rPr lang="en-US" sz="2400" dirty="0">
+                <a:latin typeface="Source Sans Pro"/>
+                <a:ea typeface="Source Sans Pro"/>
+              </a:rPr>
+              <a:t>Every element of the second list is present in the first list</a:t>
+            </a:r>
+          </a:p>
+        </p:txBody>
+      </p:sp>
+      <p:pic>
+        <p:nvPicPr>
+          <p:cNvPr id="9" name="Picture 8" descr="A screenshot of a computer code&#10;&#10;Description automatically generated">
+            <a:extLst>
+              <a:ext uri="{FF2B5EF4-FFF2-40B4-BE49-F238E27FC236}">
+                <a16:creationId xmlns:a16="http://schemas.microsoft.com/office/drawing/2014/main" id="{DB920BF8-4D61-9CD8-09EB-2AEB8A70083E}"/>
+              </a:ext>
+            </a:extLst>
+          </p:cNvPr>
+          <p:cNvPicPr>
+            <a:picLocks noChangeAspect="1"/>
+          </p:cNvPicPr>
+          <p:nvPr/>
+        </p:nvPicPr>
+        <p:blipFill>
+          <a:blip r:embed="rId2">
+            <a:extLst>
+              <a:ext uri="{28A0092B-C50C-407E-A947-70E740481C1C}">
+                <a14:useLocalDpi xmlns:a14="http://schemas.microsoft.com/office/drawing/2010/main" val="0"/>
+              </a:ext>
+            </a:extLst>
+          </a:blip>
+          <a:stretch>
+            <a:fillRect/>
+          </a:stretch>
+        </p:blipFill>
+        <p:spPr>
+          <a:xfrm>
+            <a:off x="2227699" y="2082189"/>
+            <a:ext cx="7713005" cy="4739315"/>
+          </a:xfrm>
+          <a:prstGeom prst="rect">
+            <a:avLst/>
+          </a:prstGeom>
+        </p:spPr>
+      </p:pic>
     </p:spTree>
     <p:extLst>
       <p:ext uri="{BB962C8B-B14F-4D97-AF65-F5344CB8AC3E}">
         <p14:creationId xmlns:p14="http://schemas.microsoft.com/office/powerpoint/2010/main" val="83966305"/>
+      </p:ext>
+    </p:extLst>
+  </p:cSld>
+  <p:clrMapOvr>
+    <a:masterClrMapping/>
+  </p:clrMapOvr>
+</p:sld>
+</file>
+
+<file path=ppt/slides/slide55.xml><?xml version="1.0" encoding="utf-8"?>
+<p:sld xmlns:a="http://schemas.openxmlformats.org/drawingml/2006/main" xmlns:r="http://schemas.openxmlformats.org/officeDocument/2006/relationships" xmlns:p="http://schemas.openxmlformats.org/presentationml/2006/main">
+  <p:cSld>
+    <p:spTree>
+      <p:nvGrpSpPr>
+        <p:cNvPr id="1" name="">
+          <a:extLst>
+            <a:ext uri="{FF2B5EF4-FFF2-40B4-BE49-F238E27FC236}">
+              <a16:creationId xmlns:a16="http://schemas.microsoft.com/office/drawing/2014/main" id="{EBBBF837-3478-AD04-BD2B-132A90BAE8DF}"/>
+            </a:ext>
+          </a:extLst>
+        </p:cNvPr>
+        <p:cNvGrpSpPr/>
+        <p:nvPr/>
+      </p:nvGrpSpPr>
+      <p:grpSpPr>
+        <a:xfrm>
+          <a:off x="0" y="0"/>
+          <a:ext cx="0" cy="0"/>
+          <a:chOff x="0" y="0"/>
+          <a:chExt cx="0" cy="0"/>
+        </a:xfrm>
+      </p:grpSpPr>
+      <p:sp>
+        <p:nvSpPr>
+          <p:cNvPr id="2" name="Title 1">
+            <a:extLst>
+              <a:ext uri="{FF2B5EF4-FFF2-40B4-BE49-F238E27FC236}">
+                <a16:creationId xmlns:a16="http://schemas.microsoft.com/office/drawing/2014/main" id="{B3B9F69A-6D95-337C-7195-5237D2D26DA8}"/>
+              </a:ext>
+            </a:extLst>
+          </p:cNvPr>
+          <p:cNvSpPr>
+            <a:spLocks noGrp="1"/>
+          </p:cNvSpPr>
+          <p:nvPr>
+            <p:ph type="title"/>
+          </p:nvPr>
+        </p:nvSpPr>
+        <p:spPr/>
+        <p:txBody>
+          <a:bodyPr>
+            <a:normAutofit/>
+          </a:bodyPr>
+          <a:lstStyle/>
+          <a:p>
+            <a:r>
+              <a:rPr lang="en-US" sz="3600" dirty="0">
+                <a:solidFill>
+                  <a:schemeClr val="tx2">
+                    <a:lumMod val="76000"/>
+                    <a:lumOff val="24000"/>
+                  </a:schemeClr>
+                </a:solidFill>
+                <a:latin typeface="Source Sans Pro"/>
+                <a:ea typeface="Source Sans Pro"/>
+              </a:rPr>
+              <a:t>More Related Work</a:t>
+            </a:r>
+            <a:endParaRPr lang="en-US" sz="3600" dirty="0"/>
+          </a:p>
+        </p:txBody>
+      </p:sp>
+      <p:sp>
+        <p:nvSpPr>
+          <p:cNvPr id="4" name="Rectangle 3">
+            <a:extLst>
+              <a:ext uri="{FF2B5EF4-FFF2-40B4-BE49-F238E27FC236}">
+                <a16:creationId xmlns:a16="http://schemas.microsoft.com/office/drawing/2014/main" id="{0EF6A444-A5CF-77BC-EE8B-EE44E5F16D15}"/>
+              </a:ext>
+            </a:extLst>
+          </p:cNvPr>
+          <p:cNvSpPr/>
+          <p:nvPr/>
+        </p:nvSpPr>
+        <p:spPr>
+          <a:xfrm>
+            <a:off x="951263" y="1413082"/>
+            <a:ext cx="10289061" cy="104734"/>
+          </a:xfrm>
+          <a:prstGeom prst="rect">
+            <a:avLst/>
+          </a:prstGeom>
+          <a:solidFill>
+            <a:schemeClr val="tx2">
+              <a:lumMod val="75000"/>
+              <a:lumOff val="25000"/>
+            </a:schemeClr>
+          </a:solidFill>
+          <a:ln>
+            <a:noFill/>
+          </a:ln>
+        </p:spPr>
+        <p:style>
+          <a:lnRef idx="2">
+            <a:schemeClr val="accent1">
+              <a:shade val="15000"/>
+            </a:schemeClr>
+          </a:lnRef>
+          <a:fillRef idx="1">
+            <a:schemeClr val="accent1"/>
+          </a:fillRef>
+          <a:effectRef idx="0">
+            <a:schemeClr val="accent1"/>
+          </a:effectRef>
+          <a:fontRef idx="minor">
+            <a:schemeClr val="lt1"/>
+          </a:fontRef>
+        </p:style>
+        <p:txBody>
+          <a:bodyPr rtlCol="0" anchor="ctr"/>
+          <a:lstStyle/>
+          <a:p>
+            <a:pPr algn="ctr"/>
+            <a:endParaRPr lang="en-US"/>
+          </a:p>
+        </p:txBody>
+      </p:sp>
+      <p:sp>
+        <p:nvSpPr>
+          <p:cNvPr id="7" name="Content Placeholder 2">
+            <a:extLst>
+              <a:ext uri="{FF2B5EF4-FFF2-40B4-BE49-F238E27FC236}">
+                <a16:creationId xmlns:a16="http://schemas.microsoft.com/office/drawing/2014/main" id="{882EDB95-E817-BDE6-588D-14DDBC93F98B}"/>
+              </a:ext>
+            </a:extLst>
+          </p:cNvPr>
+          <p:cNvSpPr>
+            <a:spLocks noGrp="1"/>
+          </p:cNvSpPr>
+          <p:nvPr>
+            <p:ph idx="1"/>
+          </p:nvPr>
+        </p:nvSpPr>
+        <p:spPr>
+          <a:xfrm>
+            <a:off x="838200" y="1917025"/>
+            <a:ext cx="9597705" cy="5070126"/>
+          </a:xfrm>
+        </p:spPr>
+        <p:txBody>
+          <a:bodyPr vert="horz" lIns="91440" tIns="45720" rIns="91440" bIns="45720" rtlCol="0" anchor="t">
+            <a:normAutofit/>
+          </a:bodyPr>
+          <a:lstStyle/>
+          <a:p>
+            <a:r>
+              <a:rPr lang="en-US" sz="2400" dirty="0">
+                <a:latin typeface="Source Sans Pro"/>
+                <a:ea typeface="Source Sans Pro"/>
+              </a:rPr>
+              <a:t>Parser generator libraries (e.g. ANTLR, </a:t>
+            </a:r>
+            <a:r>
+              <a:rPr lang="en-US" sz="2400" dirty="0" err="1">
+                <a:latin typeface="Source Sans Pro"/>
+                <a:ea typeface="Source Sans Pro"/>
+              </a:rPr>
+              <a:t>yacc</a:t>
+            </a:r>
+            <a:r>
+              <a:rPr lang="en-US" sz="2400" dirty="0">
+                <a:latin typeface="Source Sans Pro"/>
+                <a:ea typeface="Source Sans Pro"/>
+              </a:rPr>
+              <a:t>) handle context sensitivity but are for </a:t>
+            </a:r>
+            <a:r>
+              <a:rPr lang="en-US" sz="2400" dirty="0">
+                <a:solidFill>
+                  <a:schemeClr val="accent6">
+                    <a:lumMod val="75000"/>
+                  </a:schemeClr>
+                </a:solidFill>
+                <a:latin typeface="Source Sans Pro"/>
+                <a:ea typeface="Source Sans Pro"/>
+              </a:rPr>
+              <a:t>parsing</a:t>
+            </a:r>
+            <a:r>
+              <a:rPr lang="en-US" sz="2400" dirty="0">
+                <a:latin typeface="Source Sans Pro"/>
+                <a:ea typeface="Source Sans Pro"/>
+              </a:rPr>
+              <a:t> rather than generation</a:t>
+            </a:r>
+          </a:p>
+          <a:p>
+            <a:r>
+              <a:rPr lang="en-US" sz="2400" dirty="0">
+                <a:latin typeface="Source Sans Pro"/>
+                <a:ea typeface="Source Sans Pro"/>
+              </a:rPr>
+              <a:t>Attribute grammars handle context sensitivity but work focuses on </a:t>
+            </a:r>
+            <a:r>
+              <a:rPr lang="en-US" sz="2400" dirty="0">
+                <a:solidFill>
+                  <a:schemeClr val="accent6">
+                    <a:lumMod val="75000"/>
+                  </a:schemeClr>
+                </a:solidFill>
+                <a:latin typeface="Source Sans Pro"/>
+                <a:ea typeface="Source Sans Pro"/>
+              </a:rPr>
+              <a:t>parsing</a:t>
+            </a:r>
+            <a:r>
+              <a:rPr lang="en-US" sz="2400" dirty="0">
+                <a:latin typeface="Source Sans Pro"/>
+                <a:ea typeface="Source Sans Pro"/>
+              </a:rPr>
+              <a:t> and theoretical results</a:t>
+            </a:r>
+          </a:p>
+          <a:p>
+            <a:r>
+              <a:rPr lang="en-US" sz="2400" dirty="0">
+                <a:latin typeface="Source Sans Pro"/>
+                <a:ea typeface="Source Sans Pro"/>
+              </a:rPr>
+              <a:t>Property-based testing does not support </a:t>
+            </a:r>
+            <a:r>
+              <a:rPr lang="en-US" sz="2400" dirty="0">
+                <a:solidFill>
+                  <a:schemeClr val="accent6">
+                    <a:lumMod val="75000"/>
+                  </a:schemeClr>
+                </a:solidFill>
+                <a:latin typeface="Source Sans Pro"/>
+                <a:ea typeface="Source Sans Pro"/>
+              </a:rPr>
+              <a:t>general</a:t>
+            </a:r>
+            <a:r>
+              <a:rPr lang="en-US" sz="2400" dirty="0">
+                <a:latin typeface="Source Sans Pro"/>
+                <a:ea typeface="Source Sans Pro"/>
+              </a:rPr>
+              <a:t> </a:t>
+            </a:r>
+            <a:r>
+              <a:rPr lang="en-US" sz="2400" dirty="0">
+                <a:solidFill>
+                  <a:schemeClr val="accent6">
+                    <a:lumMod val="75000"/>
+                  </a:schemeClr>
+                </a:solidFill>
+                <a:latin typeface="Source Sans Pro"/>
+                <a:ea typeface="Source Sans Pro"/>
+              </a:rPr>
+              <a:t>context-sensitive constraints </a:t>
+            </a:r>
+            <a:r>
+              <a:rPr lang="en-US" sz="2400" dirty="0">
+                <a:latin typeface="Source Sans Pro"/>
+                <a:ea typeface="Source Sans Pro"/>
+              </a:rPr>
+              <a:t>over inputs</a:t>
+            </a:r>
+          </a:p>
+          <a:p>
+            <a:r>
+              <a:rPr lang="en-US" sz="2400" dirty="0" err="1">
+                <a:latin typeface="Source Sans Pro"/>
+                <a:ea typeface="Source Sans Pro"/>
+              </a:rPr>
+              <a:t>SyGuS</a:t>
+            </a:r>
+            <a:r>
+              <a:rPr lang="en-US" sz="2400" dirty="0">
+                <a:latin typeface="Source Sans Pro"/>
+                <a:ea typeface="Source Sans Pro"/>
+              </a:rPr>
+              <a:t> does not natively support </a:t>
+            </a:r>
+            <a:r>
+              <a:rPr lang="en-US" sz="2400" dirty="0">
+                <a:solidFill>
+                  <a:schemeClr val="accent6">
+                    <a:lumMod val="75000"/>
+                  </a:schemeClr>
+                </a:solidFill>
+                <a:latin typeface="Source Sans Pro"/>
+                <a:ea typeface="Source Sans Pro"/>
+              </a:rPr>
+              <a:t>constraints over non-top-level nonterminals</a:t>
+            </a:r>
+          </a:p>
+          <a:p>
+            <a:r>
+              <a:rPr lang="en-US" sz="2400" dirty="0">
+                <a:latin typeface="Source Sans Pro"/>
+                <a:ea typeface="Source Sans Pro"/>
+              </a:rPr>
+              <a:t>CLP engines do not currently support </a:t>
+            </a:r>
+            <a:r>
+              <a:rPr lang="en-US" sz="2400" dirty="0">
+                <a:solidFill>
+                  <a:schemeClr val="accent6">
+                    <a:lumMod val="75000"/>
+                  </a:schemeClr>
+                </a:solidFill>
+                <a:latin typeface="Source Sans Pro"/>
+                <a:ea typeface="Source Sans Pro"/>
+              </a:rPr>
+              <a:t>theory combination </a:t>
+            </a:r>
+            <a:r>
+              <a:rPr lang="en-US" sz="2400" dirty="0">
+                <a:latin typeface="Source Sans Pro"/>
+                <a:ea typeface="Source Sans Pro"/>
+              </a:rPr>
+              <a:t>at the level of generality required for practical applications</a:t>
+            </a:r>
+          </a:p>
+          <a:p>
+            <a:endParaRPr lang="en-US" sz="2400" dirty="0">
+              <a:latin typeface="Source Sans Pro"/>
+              <a:ea typeface="Source Sans Pro"/>
+            </a:endParaRPr>
+          </a:p>
+        </p:txBody>
+      </p:sp>
+    </p:spTree>
+    <p:extLst>
+      <p:ext uri="{BB962C8B-B14F-4D97-AF65-F5344CB8AC3E}">
+        <p14:creationId xmlns:p14="http://schemas.microsoft.com/office/powerpoint/2010/main" val="3156135515"/>
+      </p:ext>
+    </p:extLst>
+  </p:cSld>
+  <p:clrMapOvr>
+    <a:masterClrMapping/>
+  </p:clrMapOvr>
+</p:sld>
+</file>
+
+<file path=ppt/slides/slide56.xml><?xml version="1.0" encoding="utf-8"?>
+<p:sld xmlns:a="http://schemas.openxmlformats.org/drawingml/2006/main" xmlns:r="http://schemas.openxmlformats.org/officeDocument/2006/relationships" xmlns:p="http://schemas.openxmlformats.org/presentationml/2006/main">
+  <p:cSld>
+    <p:spTree>
+      <p:nvGrpSpPr>
+        <p:cNvPr id="1" name="">
+          <a:extLst>
+            <a:ext uri="{FF2B5EF4-FFF2-40B4-BE49-F238E27FC236}">
+              <a16:creationId xmlns:a16="http://schemas.microsoft.com/office/drawing/2014/main" id="{EBBBF837-3478-AD04-BD2B-132A90BAE8DF}"/>
+            </a:ext>
+          </a:extLst>
+        </p:cNvPr>
+        <p:cNvGrpSpPr/>
+        <p:nvPr/>
+      </p:nvGrpSpPr>
+      <p:grpSpPr>
+        <a:xfrm>
+          <a:off x="0" y="0"/>
+          <a:ext cx="0" cy="0"/>
+          <a:chOff x="0" y="0"/>
+          <a:chExt cx="0" cy="0"/>
+        </a:xfrm>
+      </p:grpSpPr>
+      <p:sp>
+        <p:nvSpPr>
+          <p:cNvPr id="2" name="Title 1">
+            <a:extLst>
+              <a:ext uri="{FF2B5EF4-FFF2-40B4-BE49-F238E27FC236}">
+                <a16:creationId xmlns:a16="http://schemas.microsoft.com/office/drawing/2014/main" id="{B3B9F69A-6D95-337C-7195-5237D2D26DA8}"/>
+              </a:ext>
+            </a:extLst>
+          </p:cNvPr>
+          <p:cNvSpPr>
+            <a:spLocks noGrp="1"/>
+          </p:cNvSpPr>
+          <p:nvPr>
+            <p:ph type="title"/>
+          </p:nvPr>
+        </p:nvSpPr>
+        <p:spPr/>
+        <p:txBody>
+          <a:bodyPr>
+            <a:normAutofit/>
+          </a:bodyPr>
+          <a:lstStyle/>
+          <a:p>
+            <a:r>
+              <a:rPr lang="en-US" sz="3600" dirty="0">
+                <a:solidFill>
+                  <a:schemeClr val="tx2">
+                    <a:lumMod val="76000"/>
+                    <a:lumOff val="24000"/>
+                  </a:schemeClr>
+                </a:solidFill>
+                <a:latin typeface="Source Sans Pro"/>
+                <a:ea typeface="Source Sans Pro"/>
+              </a:rPr>
+              <a:t>Grammar Mutations</a:t>
+            </a:r>
+            <a:endParaRPr lang="en-US" sz="3600" dirty="0"/>
+          </a:p>
+        </p:txBody>
+      </p:sp>
+      <p:sp>
+        <p:nvSpPr>
+          <p:cNvPr id="4" name="Rectangle 3">
+            <a:extLst>
+              <a:ext uri="{FF2B5EF4-FFF2-40B4-BE49-F238E27FC236}">
+                <a16:creationId xmlns:a16="http://schemas.microsoft.com/office/drawing/2014/main" id="{0EF6A444-A5CF-77BC-EE8B-EE44E5F16D15}"/>
+              </a:ext>
+            </a:extLst>
+          </p:cNvPr>
+          <p:cNvSpPr/>
+          <p:nvPr/>
+        </p:nvSpPr>
+        <p:spPr>
+          <a:xfrm>
+            <a:off x="951263" y="1413082"/>
+            <a:ext cx="10289061" cy="104734"/>
+          </a:xfrm>
+          <a:prstGeom prst="rect">
+            <a:avLst/>
+          </a:prstGeom>
+          <a:solidFill>
+            <a:schemeClr val="tx2">
+              <a:lumMod val="75000"/>
+              <a:lumOff val="25000"/>
+            </a:schemeClr>
+          </a:solidFill>
+          <a:ln>
+            <a:noFill/>
+          </a:ln>
+        </p:spPr>
+        <p:style>
+          <a:lnRef idx="2">
+            <a:schemeClr val="accent1">
+              <a:shade val="15000"/>
+            </a:schemeClr>
+          </a:lnRef>
+          <a:fillRef idx="1">
+            <a:schemeClr val="accent1"/>
+          </a:fillRef>
+          <a:effectRef idx="0">
+            <a:schemeClr val="accent1"/>
+          </a:effectRef>
+          <a:fontRef idx="minor">
+            <a:schemeClr val="lt1"/>
+          </a:fontRef>
+        </p:style>
+        <p:txBody>
+          <a:bodyPr rtlCol="0" anchor="ctr"/>
+          <a:lstStyle/>
+          <a:p>
+            <a:pPr algn="ctr"/>
+            <a:endParaRPr lang="en-US"/>
+          </a:p>
+        </p:txBody>
+      </p:sp>
+      <p:sp>
+        <p:nvSpPr>
+          <p:cNvPr id="7" name="Content Placeholder 2">
+            <a:extLst>
+              <a:ext uri="{FF2B5EF4-FFF2-40B4-BE49-F238E27FC236}">
+                <a16:creationId xmlns:a16="http://schemas.microsoft.com/office/drawing/2014/main" id="{882EDB95-E817-BDE6-588D-14DDBC93F98B}"/>
+              </a:ext>
+            </a:extLst>
+          </p:cNvPr>
+          <p:cNvSpPr>
+            <a:spLocks noGrp="1"/>
+          </p:cNvSpPr>
+          <p:nvPr>
+            <p:ph idx="1"/>
+          </p:nvPr>
+        </p:nvSpPr>
+        <p:spPr>
+          <a:xfrm>
+            <a:off x="838200" y="1787874"/>
+            <a:ext cx="10402124" cy="5070126"/>
+          </a:xfrm>
+        </p:spPr>
+        <p:txBody>
+          <a:bodyPr vert="horz" lIns="91440" tIns="45720" rIns="91440" bIns="45720" rtlCol="0" anchor="t">
+            <a:normAutofit/>
+          </a:bodyPr>
+          <a:lstStyle/>
+          <a:p>
+            <a:pPr marL="0" indent="0">
+              <a:buNone/>
+            </a:pPr>
+            <a:r>
+              <a:rPr lang="en-US" sz="2400" dirty="0">
+                <a:latin typeface="Source Sans Pro"/>
+                <a:ea typeface="Source Sans Pro"/>
+              </a:rPr>
+              <a:t>How to perform structure-aware mutations on context-sensitive grammars?</a:t>
+            </a:r>
+          </a:p>
+          <a:p>
+            <a:r>
+              <a:rPr lang="en-US" sz="2400" dirty="0">
+                <a:solidFill>
+                  <a:schemeClr val="accent6">
+                    <a:lumMod val="75000"/>
+                  </a:schemeClr>
+                </a:solidFill>
+                <a:latin typeface="Source Sans Pro"/>
+                <a:ea typeface="Source Sans Pro"/>
+              </a:rPr>
+              <a:t>Crossover mutation </a:t>
+            </a:r>
+            <a:r>
+              <a:rPr lang="en-US" sz="2400" dirty="0">
+                <a:latin typeface="Source Sans Pro"/>
+                <a:ea typeface="Source Sans Pro"/>
+              </a:rPr>
+              <a:t>swapping </a:t>
+            </a:r>
+            <a:r>
+              <a:rPr lang="en-US" sz="2400" dirty="0">
+                <a:solidFill>
+                  <a:srgbClr val="15BBC0"/>
+                </a:solidFill>
+                <a:latin typeface="Monaco" pitchFamily="2" charset="77"/>
+                <a:ea typeface="Source Sans Pro"/>
+              </a:rPr>
+              <a:t>GROUP_ID </a:t>
+            </a:r>
+            <a:r>
+              <a:rPr lang="en-US" sz="2400" dirty="0">
+                <a:latin typeface="Source Sans Pro"/>
+                <a:ea typeface="Source Sans Pro"/>
+              </a:rPr>
+              <a:t>and </a:t>
+            </a:r>
+            <a:r>
+              <a:rPr lang="en-US" sz="2400" dirty="0">
+                <a:solidFill>
+                  <a:srgbClr val="15BBC0"/>
+                </a:solidFill>
+                <a:latin typeface="Monaco" pitchFamily="2" charset="77"/>
+                <a:ea typeface="Source Sans Pro"/>
+              </a:rPr>
+              <a:t>RG_LIST</a:t>
+            </a:r>
+          </a:p>
+          <a:p>
+            <a:r>
+              <a:rPr lang="en-US" sz="2400" dirty="0">
+                <a:solidFill>
+                  <a:schemeClr val="accent6">
+                    <a:lumMod val="75000"/>
+                  </a:schemeClr>
+                </a:solidFill>
+                <a:latin typeface="Source Sans Pro"/>
+                <a:ea typeface="Source Sans Pro"/>
+              </a:rPr>
+              <a:t>Local constraints </a:t>
+            </a:r>
+            <a:r>
+              <a:rPr lang="en-US" sz="2400" dirty="0">
+                <a:latin typeface="Source Sans Pro"/>
+                <a:ea typeface="Source Sans Pro"/>
+              </a:rPr>
+              <a:t>are easier to maintain</a:t>
+            </a:r>
+          </a:p>
+        </p:txBody>
+      </p:sp>
+      <p:pic>
+        <p:nvPicPr>
+          <p:cNvPr id="5" name="Picture 4" descr="A white screen with black text&#10;&#10;Description automatically generated">
+            <a:extLst>
+              <a:ext uri="{FF2B5EF4-FFF2-40B4-BE49-F238E27FC236}">
+                <a16:creationId xmlns:a16="http://schemas.microsoft.com/office/drawing/2014/main" id="{E90417CE-FA34-B923-2C5A-45707301CD2C}"/>
+              </a:ext>
+            </a:extLst>
+          </p:cNvPr>
+          <p:cNvPicPr>
+            <a:picLocks noChangeAspect="1"/>
+          </p:cNvPicPr>
+          <p:nvPr/>
+        </p:nvPicPr>
+        <p:blipFill>
+          <a:blip r:embed="rId2">
+            <a:extLst>
+              <a:ext uri="{28A0092B-C50C-407E-A947-70E740481C1C}">
+                <a14:useLocalDpi xmlns:a14="http://schemas.microsoft.com/office/drawing/2010/main" val="0"/>
+              </a:ext>
+            </a:extLst>
+          </a:blip>
+          <a:stretch>
+            <a:fillRect/>
+          </a:stretch>
+        </p:blipFill>
+        <p:spPr>
+          <a:xfrm>
+            <a:off x="2153062" y="3158930"/>
+            <a:ext cx="7772400" cy="3699070"/>
+          </a:xfrm>
+          <a:prstGeom prst="rect">
+            <a:avLst/>
+          </a:prstGeom>
+        </p:spPr>
+      </p:pic>
+    </p:spTree>
+    <p:extLst>
+      <p:ext uri="{BB962C8B-B14F-4D97-AF65-F5344CB8AC3E}">
+        <p14:creationId xmlns:p14="http://schemas.microsoft.com/office/powerpoint/2010/main" val="2456604579"/>
+      </p:ext>
+    </p:extLst>
+  </p:cSld>
+  <p:clrMapOvr>
+    <a:masterClrMapping/>
+  </p:clrMapOvr>
+</p:sld>
+</file>
+
+<file path=ppt/slides/slide57.xml><?xml version="1.0" encoding="utf-8"?>
+<p:sld xmlns:a="http://schemas.openxmlformats.org/drawingml/2006/main" xmlns:r="http://schemas.openxmlformats.org/officeDocument/2006/relationships" xmlns:p="http://schemas.openxmlformats.org/presentationml/2006/main">
+  <p:cSld>
+    <p:spTree>
+      <p:nvGrpSpPr>
+        <p:cNvPr id="1" name="">
+          <a:extLst>
+            <a:ext uri="{FF2B5EF4-FFF2-40B4-BE49-F238E27FC236}">
+              <a16:creationId xmlns:a16="http://schemas.microsoft.com/office/drawing/2014/main" id="{EBBBF837-3478-AD04-BD2B-132A90BAE8DF}"/>
+            </a:ext>
+          </a:extLst>
+        </p:cNvPr>
+        <p:cNvGrpSpPr/>
+        <p:nvPr/>
+      </p:nvGrpSpPr>
+      <p:grpSpPr>
+        <a:xfrm>
+          <a:off x="0" y="0"/>
+          <a:ext cx="0" cy="0"/>
+          <a:chOff x="0" y="0"/>
+          <a:chExt cx="0" cy="0"/>
+        </a:xfrm>
+      </p:grpSpPr>
+      <p:sp>
+        <p:nvSpPr>
+          <p:cNvPr id="2" name="Title 1">
+            <a:extLst>
+              <a:ext uri="{FF2B5EF4-FFF2-40B4-BE49-F238E27FC236}">
+                <a16:creationId xmlns:a16="http://schemas.microsoft.com/office/drawing/2014/main" id="{B3B9F69A-6D95-337C-7195-5237D2D26DA8}"/>
+              </a:ext>
+            </a:extLst>
+          </p:cNvPr>
+          <p:cNvSpPr>
+            <a:spLocks noGrp="1"/>
+          </p:cNvSpPr>
+          <p:nvPr>
+            <p:ph type="title"/>
+          </p:nvPr>
+        </p:nvSpPr>
+        <p:spPr/>
+        <p:txBody>
+          <a:bodyPr>
+            <a:normAutofit/>
+          </a:bodyPr>
+          <a:lstStyle/>
+          <a:p>
+            <a:r>
+              <a:rPr lang="en-US" sz="3600" dirty="0">
+                <a:solidFill>
+                  <a:schemeClr val="tx2">
+                    <a:lumMod val="76000"/>
+                    <a:lumOff val="24000"/>
+                  </a:schemeClr>
+                </a:solidFill>
+                <a:latin typeface="Source Sans Pro"/>
+                <a:ea typeface="Source Sans Pro"/>
+              </a:rPr>
+              <a:t>Semantics: Interpretation Function</a:t>
+            </a:r>
+            <a:endParaRPr lang="en-US" sz="3600" dirty="0"/>
+          </a:p>
+        </p:txBody>
+      </p:sp>
+      <p:sp>
+        <p:nvSpPr>
+          <p:cNvPr id="4" name="Rectangle 3">
+            <a:extLst>
+              <a:ext uri="{FF2B5EF4-FFF2-40B4-BE49-F238E27FC236}">
+                <a16:creationId xmlns:a16="http://schemas.microsoft.com/office/drawing/2014/main" id="{0EF6A444-A5CF-77BC-EE8B-EE44E5F16D15}"/>
+              </a:ext>
+            </a:extLst>
+          </p:cNvPr>
+          <p:cNvSpPr/>
+          <p:nvPr/>
+        </p:nvSpPr>
+        <p:spPr>
+          <a:xfrm>
+            <a:off x="951263" y="1413082"/>
+            <a:ext cx="10289061" cy="104734"/>
+          </a:xfrm>
+          <a:prstGeom prst="rect">
+            <a:avLst/>
+          </a:prstGeom>
+          <a:solidFill>
+            <a:schemeClr val="tx2">
+              <a:lumMod val="75000"/>
+              <a:lumOff val="25000"/>
+            </a:schemeClr>
+          </a:solidFill>
+          <a:ln>
+            <a:noFill/>
+          </a:ln>
+        </p:spPr>
+        <p:style>
+          <a:lnRef idx="2">
+            <a:schemeClr val="accent1">
+              <a:shade val="15000"/>
+            </a:schemeClr>
+          </a:lnRef>
+          <a:fillRef idx="1">
+            <a:schemeClr val="accent1"/>
+          </a:fillRef>
+          <a:effectRef idx="0">
+            <a:schemeClr val="accent1"/>
+          </a:effectRef>
+          <a:fontRef idx="minor">
+            <a:schemeClr val="lt1"/>
+          </a:fontRef>
+        </p:style>
+        <p:txBody>
+          <a:bodyPr rtlCol="0" anchor="ctr"/>
+          <a:lstStyle/>
+          <a:p>
+            <a:pPr algn="ctr"/>
+            <a:endParaRPr lang="en-US"/>
+          </a:p>
+        </p:txBody>
+      </p:sp>
+      <mc:AlternateContent xmlns:mc="http://schemas.openxmlformats.org/markup-compatibility/2006">
+        <mc:Choice xmlns:a14="http://schemas.microsoft.com/office/drawing/2010/main" Requires="a14">
+          <p:sp>
+            <p:nvSpPr>
+              <p:cNvPr id="7" name="Content Placeholder 2">
+                <a:extLst>
+                  <a:ext uri="{FF2B5EF4-FFF2-40B4-BE49-F238E27FC236}">
+                    <a16:creationId xmlns:a16="http://schemas.microsoft.com/office/drawing/2014/main" id="{882EDB95-E817-BDE6-588D-14DDBC93F98B}"/>
+                  </a:ext>
+                </a:extLst>
+              </p:cNvPr>
+              <p:cNvSpPr>
+                <a:spLocks noGrp="1"/>
+              </p:cNvSpPr>
+              <p:nvPr>
+                <p:ph idx="1"/>
+              </p:nvPr>
+            </p:nvSpPr>
+            <p:spPr>
+              <a:xfrm>
+                <a:off x="838200" y="1787874"/>
+                <a:ext cx="10402124" cy="5070126"/>
+              </a:xfrm>
+            </p:spPr>
+            <p:txBody>
+              <a:bodyPr vert="horz" lIns="91440" tIns="45720" rIns="91440" bIns="45720" rtlCol="0" anchor="t">
+                <a:normAutofit/>
+              </a:bodyPr>
+              <a:lstStyle/>
+              <a:p>
+                <a:pPr marL="0" indent="0">
+                  <a:buNone/>
+                </a:pPr>
+                <a:r>
+                  <a:rPr lang="en-US" sz="2400" dirty="0">
+                    <a:latin typeface="Source Sans Pro"/>
+                    <a:ea typeface="Source Sans Pro"/>
+                  </a:rPr>
+                  <a:t>Interpretation function </a:t>
+                </a:r>
+                <a14:m>
+                  <m:oMath xmlns:m="http://schemas.openxmlformats.org/officeDocument/2006/math">
+                    <m:sSub>
+                      <m:sSubPr>
+                        <m:ctrlPr>
+                          <a:rPr lang="en-US" sz="2400" i="1" dirty="0" smtClean="0">
+                            <a:solidFill>
+                              <a:schemeClr val="tx2">
+                                <a:lumMod val="75000"/>
+                                <a:lumOff val="25000"/>
+                              </a:schemeClr>
+                            </a:solidFill>
+                            <a:latin typeface="Cambria Math" panose="02040503050406030204" pitchFamily="18" charset="0"/>
+                            <a:ea typeface="Source Sans Pro"/>
+                          </a:rPr>
+                        </m:ctrlPr>
+                      </m:sSubPr>
+                      <m:e>
+                        <m:r>
+                          <a:rPr lang="en-US" sz="2400" i="1" dirty="0" smtClean="0">
+                            <a:solidFill>
+                              <a:schemeClr val="tx2">
+                                <a:lumMod val="75000"/>
+                                <a:lumOff val="25000"/>
+                              </a:schemeClr>
+                            </a:solidFill>
+                            <a:latin typeface="Cambria Math" panose="02040503050406030204" pitchFamily="18" charset="0"/>
+                            <a:ea typeface="Source Sans Pro"/>
+                          </a:rPr>
+                          <m:t>𝐼</m:t>
+                        </m:r>
+                      </m:e>
+                      <m:sub>
+                        <m:r>
+                          <a:rPr lang="en-US" sz="2400" i="1" dirty="0" smtClean="0">
+                            <a:solidFill>
+                              <a:schemeClr val="tx2">
+                                <a:lumMod val="75000"/>
+                                <a:lumOff val="25000"/>
+                              </a:schemeClr>
+                            </a:solidFill>
+                            <a:latin typeface="Cambria Math" panose="02040503050406030204" pitchFamily="18" charset="0"/>
+                            <a:ea typeface="Source Sans Pro"/>
+                          </a:rPr>
+                          <m:t>𝑡𝑟</m:t>
+                        </m:r>
+                      </m:sub>
+                    </m:sSub>
+                    <m:r>
+                      <a:rPr lang="en-US" sz="2400" i="1" dirty="0" smtClean="0">
+                        <a:solidFill>
+                          <a:schemeClr val="tx2">
+                            <a:lumMod val="75000"/>
+                            <a:lumOff val="25000"/>
+                          </a:schemeClr>
+                        </a:solidFill>
+                        <a:latin typeface="Cambria Math" panose="02040503050406030204" pitchFamily="18" charset="0"/>
+                        <a:ea typeface="Source Sans Pro"/>
+                      </a:rPr>
+                      <m:t>(</m:t>
+                    </m:r>
+                    <m:r>
+                      <a:rPr lang="en-US" sz="2400" i="1" dirty="0" smtClean="0">
+                        <a:solidFill>
+                          <a:schemeClr val="tx2">
+                            <a:lumMod val="75000"/>
+                            <a:lumOff val="25000"/>
+                          </a:schemeClr>
+                        </a:solidFill>
+                        <a:latin typeface="Cambria Math" panose="02040503050406030204" pitchFamily="18" charset="0"/>
+                        <a:ea typeface="Source Sans Pro"/>
+                      </a:rPr>
+                      <m:t>𝑡</m:t>
+                    </m:r>
+                    <m:r>
+                      <a:rPr lang="en-US" sz="2400" i="1" dirty="0" smtClean="0">
+                        <a:solidFill>
+                          <a:schemeClr val="tx2">
+                            <a:lumMod val="75000"/>
+                            <a:lumOff val="25000"/>
+                          </a:schemeClr>
+                        </a:solidFill>
+                        <a:latin typeface="Cambria Math" panose="02040503050406030204" pitchFamily="18" charset="0"/>
+                        <a:ea typeface="Source Sans Pro"/>
+                      </a:rPr>
+                      <m:t>) </m:t>
+                    </m:r>
+                  </m:oMath>
+                </a14:m>
+                <a:r>
+                  <a:rPr lang="en-US" sz="2400" dirty="0">
+                    <a:latin typeface="Source Sans Pro"/>
+                    <a:ea typeface="Source Sans Pro"/>
+                  </a:rPr>
+                  <a:t>outputs denotation of term </a:t>
+                </a:r>
+                <a14:m>
+                  <m:oMath xmlns:m="http://schemas.openxmlformats.org/officeDocument/2006/math">
+                    <m:r>
+                      <a:rPr lang="en-US" sz="2400" i="1" dirty="0" smtClean="0">
+                        <a:solidFill>
+                          <a:schemeClr val="tx2">
+                            <a:lumMod val="75000"/>
+                            <a:lumOff val="25000"/>
+                          </a:schemeClr>
+                        </a:solidFill>
+                        <a:latin typeface="Cambria Math" panose="02040503050406030204" pitchFamily="18" charset="0"/>
+                        <a:ea typeface="Source Sans Pro"/>
+                      </a:rPr>
+                      <m:t>𝑡</m:t>
+                    </m:r>
+                  </m:oMath>
+                </a14:m>
+                <a:r>
+                  <a:rPr lang="en-US" sz="2400" dirty="0">
+                    <a:latin typeface="Source Sans Pro"/>
+                    <a:ea typeface="Source Sans Pro"/>
+                  </a:rPr>
+                  <a:t> in AST </a:t>
+                </a:r>
+                <a14:m>
+                  <m:oMath xmlns:m="http://schemas.openxmlformats.org/officeDocument/2006/math">
+                    <m:r>
+                      <a:rPr lang="en-US" sz="2400" i="1" dirty="0" smtClean="0">
+                        <a:solidFill>
+                          <a:schemeClr val="tx2">
+                            <a:lumMod val="75000"/>
+                            <a:lumOff val="25000"/>
+                          </a:schemeClr>
+                        </a:solidFill>
+                        <a:latin typeface="Cambria Math" panose="02040503050406030204" pitchFamily="18" charset="0"/>
+                        <a:ea typeface="Source Sans Pro"/>
+                      </a:rPr>
+                      <m:t>𝑡𝑟</m:t>
+                    </m:r>
+                  </m:oMath>
+                </a14:m>
+                <a:endParaRPr lang="en-US" sz="2400" dirty="0">
+                  <a:latin typeface="Source Sans Pro"/>
+                  <a:ea typeface="Source Sans Pro"/>
+                </a:endParaRPr>
+              </a:p>
+              <a:p>
+                <a:pPr marL="0" indent="0">
+                  <a:buNone/>
+                </a:pPr>
+                <a14:m>
+                  <m:oMath xmlns:m="http://schemas.openxmlformats.org/officeDocument/2006/math">
+                    <m:sSub>
+                      <m:sSubPr>
+                        <m:ctrlPr>
+                          <a:rPr lang="en-US" sz="2400" i="1" dirty="0" smtClean="0">
+                            <a:solidFill>
+                              <a:schemeClr val="tx2">
+                                <a:lumMod val="75000"/>
+                                <a:lumOff val="25000"/>
+                              </a:schemeClr>
+                            </a:solidFill>
+                            <a:latin typeface="Cambria Math" panose="02040503050406030204" pitchFamily="18" charset="0"/>
+                            <a:ea typeface="Source Sans Pro"/>
+                          </a:rPr>
+                        </m:ctrlPr>
+                      </m:sSubPr>
+                      <m:e>
+                        <m:r>
+                          <a:rPr lang="en-US" sz="2400" i="1" dirty="0" smtClean="0">
+                            <a:solidFill>
+                              <a:schemeClr val="tx2">
+                                <a:lumMod val="75000"/>
+                                <a:lumOff val="25000"/>
+                              </a:schemeClr>
+                            </a:solidFill>
+                            <a:latin typeface="Cambria Math" panose="02040503050406030204" pitchFamily="18" charset="0"/>
+                            <a:ea typeface="Source Sans Pro"/>
+                          </a:rPr>
+                          <m:t>𝐼</m:t>
+                        </m:r>
+                      </m:e>
+                      <m:sub>
+                        <m:r>
+                          <a:rPr lang="en-US" sz="2400" i="1" dirty="0" smtClean="0">
+                            <a:solidFill>
+                              <a:schemeClr val="tx2">
+                                <a:lumMod val="75000"/>
+                                <a:lumOff val="25000"/>
+                              </a:schemeClr>
+                            </a:solidFill>
+                            <a:latin typeface="Cambria Math" panose="02040503050406030204" pitchFamily="18" charset="0"/>
+                            <a:ea typeface="Source Sans Pro"/>
+                          </a:rPr>
+                          <m:t>𝑡𝑟</m:t>
+                        </m:r>
+                      </m:sub>
+                    </m:sSub>
+                    <m:r>
+                      <a:rPr lang="en-US" sz="2400" i="1" dirty="0" smtClean="0">
+                        <a:solidFill>
+                          <a:schemeClr val="tx2">
+                            <a:lumMod val="75000"/>
+                            <a:lumOff val="25000"/>
+                          </a:schemeClr>
+                        </a:solidFill>
+                        <a:latin typeface="Cambria Math" panose="02040503050406030204" pitchFamily="18" charset="0"/>
+                        <a:ea typeface="Source Sans Pro"/>
+                      </a:rPr>
+                      <m:t> </m:t>
+                    </m:r>
+                  </m:oMath>
+                </a14:m>
+                <a:r>
+                  <a:rPr lang="en-US" sz="2400" dirty="0">
+                    <a:latin typeface="Source Sans Pro"/>
+                    <a:ea typeface="Source Sans Pro"/>
+                  </a:rPr>
+                  <a:t>also maps function and predicate symbols to their fixed interpretations</a:t>
+                </a:r>
+              </a:p>
+            </p:txBody>
+          </p:sp>
+        </mc:Choice>
+        <mc:Fallback>
+          <p:sp>
+            <p:nvSpPr>
+              <p:cNvPr id="7" name="Content Placeholder 2">
+                <a:extLst>
+                  <a:ext uri="{FF2B5EF4-FFF2-40B4-BE49-F238E27FC236}">
+                    <a16:creationId xmlns:a16="http://schemas.microsoft.com/office/drawing/2014/main" id="{882EDB95-E817-BDE6-588D-14DDBC93F98B}"/>
+                  </a:ext>
+                </a:extLst>
+              </p:cNvPr>
+              <p:cNvSpPr>
+                <a:spLocks noGrp="1" noRot="1" noChangeAspect="1" noMove="1" noResize="1" noEditPoints="1" noAdjustHandles="1" noChangeArrowheads="1" noChangeShapeType="1" noTextEdit="1"/>
+              </p:cNvSpPr>
+              <p:nvPr>
+                <p:ph idx="1"/>
+              </p:nvPr>
+            </p:nvSpPr>
+            <p:spPr>
+              <a:xfrm>
+                <a:off x="838200" y="1787874"/>
+                <a:ext cx="10402124" cy="5070126"/>
+              </a:xfrm>
+              <a:blipFill>
+                <a:blip r:embed="rId2"/>
+                <a:stretch>
+                  <a:fillRect l="-976" t="-1750"/>
+                </a:stretch>
+              </a:blipFill>
+            </p:spPr>
+            <p:txBody>
+              <a:bodyPr/>
+              <a:lstStyle/>
+              <a:p>
+                <a:r>
+                  <a:rPr lang="en-US">
+                    <a:noFill/>
+                  </a:rPr>
+                  <a:t> </a:t>
+                </a:r>
+              </a:p>
+            </p:txBody>
+          </p:sp>
+        </mc:Fallback>
+      </mc:AlternateContent>
+      <p:pic>
+        <p:nvPicPr>
+          <p:cNvPr id="6" name="Picture 5" descr="A white background with blue text&#10;&#10;Description automatically generated">
+            <a:extLst>
+              <a:ext uri="{FF2B5EF4-FFF2-40B4-BE49-F238E27FC236}">
+                <a16:creationId xmlns:a16="http://schemas.microsoft.com/office/drawing/2014/main" id="{9D4CB4AA-81C8-1030-036A-008B1906C3AD}"/>
+              </a:ext>
+            </a:extLst>
+          </p:cNvPr>
+          <p:cNvPicPr>
+            <a:picLocks noChangeAspect="1"/>
+          </p:cNvPicPr>
+          <p:nvPr/>
+        </p:nvPicPr>
+        <p:blipFill>
+          <a:blip r:embed="rId3">
+            <a:extLst>
+              <a:ext uri="{28A0092B-C50C-407E-A947-70E740481C1C}">
+                <a14:useLocalDpi xmlns:a14="http://schemas.microsoft.com/office/drawing/2010/main" val="0"/>
+              </a:ext>
+            </a:extLst>
+          </a:blip>
+          <a:stretch>
+            <a:fillRect/>
+          </a:stretch>
+        </p:blipFill>
+        <p:spPr>
+          <a:xfrm>
+            <a:off x="2153062" y="3429000"/>
+            <a:ext cx="7772400" cy="2295939"/>
+          </a:xfrm>
+          <a:prstGeom prst="rect">
+            <a:avLst/>
+          </a:prstGeom>
+        </p:spPr>
+      </p:pic>
+    </p:spTree>
+    <p:extLst>
+      <p:ext uri="{BB962C8B-B14F-4D97-AF65-F5344CB8AC3E}">
+        <p14:creationId xmlns:p14="http://schemas.microsoft.com/office/powerpoint/2010/main" val="2333285428"/>
+      </p:ext>
+    </p:extLst>
+  </p:cSld>
+  <p:clrMapOvr>
+    <a:masterClrMapping/>
+  </p:clrMapOvr>
+</p:sld>
+</file>
+
+<file path=ppt/slides/slide58.xml><?xml version="1.0" encoding="utf-8"?>
+<p:sld xmlns:a="http://schemas.openxmlformats.org/drawingml/2006/main" xmlns:r="http://schemas.openxmlformats.org/officeDocument/2006/relationships" xmlns:p="http://schemas.openxmlformats.org/presentationml/2006/main">
+  <p:cSld>
+    <p:spTree>
+      <p:nvGrpSpPr>
+        <p:cNvPr id="1" name="">
+          <a:extLst>
+            <a:ext uri="{FF2B5EF4-FFF2-40B4-BE49-F238E27FC236}">
+              <a16:creationId xmlns:a16="http://schemas.microsoft.com/office/drawing/2014/main" id="{EBBBF837-3478-AD04-BD2B-132A90BAE8DF}"/>
+            </a:ext>
+          </a:extLst>
+        </p:cNvPr>
+        <p:cNvGrpSpPr/>
+        <p:nvPr/>
+      </p:nvGrpSpPr>
+      <p:grpSpPr>
+        <a:xfrm>
+          <a:off x="0" y="0"/>
+          <a:ext cx="0" cy="0"/>
+          <a:chOff x="0" y="0"/>
+          <a:chExt cx="0" cy="0"/>
+        </a:xfrm>
+      </p:grpSpPr>
+      <p:sp>
+        <p:nvSpPr>
+          <p:cNvPr id="2" name="Title 1">
+            <a:extLst>
+              <a:ext uri="{FF2B5EF4-FFF2-40B4-BE49-F238E27FC236}">
+                <a16:creationId xmlns:a16="http://schemas.microsoft.com/office/drawing/2014/main" id="{B3B9F69A-6D95-337C-7195-5237D2D26DA8}"/>
+              </a:ext>
+            </a:extLst>
+          </p:cNvPr>
+          <p:cNvSpPr>
+            <a:spLocks noGrp="1"/>
+          </p:cNvSpPr>
+          <p:nvPr>
+            <p:ph type="title"/>
+          </p:nvPr>
+        </p:nvSpPr>
+        <p:spPr/>
+        <p:txBody>
+          <a:bodyPr>
+            <a:normAutofit/>
+          </a:bodyPr>
+          <a:lstStyle/>
+          <a:p>
+            <a:r>
+              <a:rPr lang="en-US" sz="3600" dirty="0">
+                <a:solidFill>
+                  <a:schemeClr val="tx2">
+                    <a:lumMod val="76000"/>
+                    <a:lumOff val="24000"/>
+                  </a:schemeClr>
+                </a:solidFill>
+                <a:latin typeface="Source Sans Pro"/>
+                <a:ea typeface="Source Sans Pro"/>
+              </a:rPr>
+              <a:t>Semantics: Satisfaction Relation</a:t>
+            </a:r>
+            <a:endParaRPr lang="en-US" sz="3600" dirty="0"/>
+          </a:p>
+        </p:txBody>
+      </p:sp>
+      <p:sp>
+        <p:nvSpPr>
+          <p:cNvPr id="4" name="Rectangle 3">
+            <a:extLst>
+              <a:ext uri="{FF2B5EF4-FFF2-40B4-BE49-F238E27FC236}">
+                <a16:creationId xmlns:a16="http://schemas.microsoft.com/office/drawing/2014/main" id="{0EF6A444-A5CF-77BC-EE8B-EE44E5F16D15}"/>
+              </a:ext>
+            </a:extLst>
+          </p:cNvPr>
+          <p:cNvSpPr/>
+          <p:nvPr/>
+        </p:nvSpPr>
+        <p:spPr>
+          <a:xfrm>
+            <a:off x="951263" y="1413082"/>
+            <a:ext cx="10289061" cy="104734"/>
+          </a:xfrm>
+          <a:prstGeom prst="rect">
+            <a:avLst/>
+          </a:prstGeom>
+          <a:solidFill>
+            <a:schemeClr val="tx2">
+              <a:lumMod val="75000"/>
+              <a:lumOff val="25000"/>
+            </a:schemeClr>
+          </a:solidFill>
+          <a:ln>
+            <a:noFill/>
+          </a:ln>
+        </p:spPr>
+        <p:style>
+          <a:lnRef idx="2">
+            <a:schemeClr val="accent1">
+              <a:shade val="15000"/>
+            </a:schemeClr>
+          </a:lnRef>
+          <a:fillRef idx="1">
+            <a:schemeClr val="accent1"/>
+          </a:fillRef>
+          <a:effectRef idx="0">
+            <a:schemeClr val="accent1"/>
+          </a:effectRef>
+          <a:fontRef idx="minor">
+            <a:schemeClr val="lt1"/>
+          </a:fontRef>
+        </p:style>
+        <p:txBody>
+          <a:bodyPr rtlCol="0" anchor="ctr"/>
+          <a:lstStyle/>
+          <a:p>
+            <a:pPr algn="ctr"/>
+            <a:endParaRPr lang="en-US"/>
+          </a:p>
+        </p:txBody>
+      </p:sp>
+      <mc:AlternateContent xmlns:mc="http://schemas.openxmlformats.org/markup-compatibility/2006">
+        <mc:Choice xmlns:a14="http://schemas.microsoft.com/office/drawing/2010/main" Requires="a14">
+          <p:sp>
+            <p:nvSpPr>
+              <p:cNvPr id="7" name="Content Placeholder 2">
+                <a:extLst>
+                  <a:ext uri="{FF2B5EF4-FFF2-40B4-BE49-F238E27FC236}">
+                    <a16:creationId xmlns:a16="http://schemas.microsoft.com/office/drawing/2014/main" id="{882EDB95-E817-BDE6-588D-14DDBC93F98B}"/>
+                  </a:ext>
+                </a:extLst>
+              </p:cNvPr>
+              <p:cNvSpPr>
+                <a:spLocks noGrp="1"/>
+              </p:cNvSpPr>
+              <p:nvPr>
+                <p:ph idx="1"/>
+              </p:nvPr>
+            </p:nvSpPr>
+            <p:spPr>
+              <a:xfrm>
+                <a:off x="838200" y="1787874"/>
+                <a:ext cx="10402124" cy="5070126"/>
+              </a:xfrm>
+            </p:spPr>
+            <p:txBody>
+              <a:bodyPr vert="horz" lIns="91440" tIns="45720" rIns="91440" bIns="45720" rtlCol="0" anchor="t">
+                <a:normAutofit/>
+              </a:bodyPr>
+              <a:lstStyle/>
+              <a:p>
+                <a:pPr marL="0" indent="0">
+                  <a:buNone/>
+                </a:pPr>
+                <a:r>
+                  <a:rPr lang="en-US" sz="2400" dirty="0">
+                    <a:latin typeface="Source Sans Pro"/>
+                    <a:ea typeface="Source Sans Pro"/>
+                  </a:rPr>
+                  <a:t>Satisfaction relation </a:t>
+                </a:r>
+                <a14:m>
+                  <m:oMath xmlns:m="http://schemas.openxmlformats.org/officeDocument/2006/math">
+                    <m:sSub>
+                      <m:sSubPr>
+                        <m:ctrlPr>
+                          <a:rPr lang="en-US" sz="2400" b="0" i="1" smtClean="0">
+                            <a:latin typeface="Cambria Math" panose="02040503050406030204" pitchFamily="18" charset="0"/>
+                            <a:ea typeface="Source Sans Pro"/>
+                          </a:rPr>
+                        </m:ctrlPr>
+                      </m:sSubPr>
+                      <m:e>
+                        <m:r>
+                          <a:rPr lang="en-US" sz="2400" b="0" i="1" smtClean="0">
+                            <a:latin typeface="Cambria Math" panose="02040503050406030204" pitchFamily="18" charset="0"/>
+                            <a:ea typeface="Source Sans Pro"/>
+                          </a:rPr>
+                          <m:t>⊨</m:t>
+                        </m:r>
+                      </m:e>
+                      <m:sub>
+                        <m:r>
+                          <a:rPr lang="en-US" sz="2400" b="0" i="1" smtClean="0">
+                            <a:latin typeface="Cambria Math" panose="02040503050406030204" pitchFamily="18" charset="0"/>
+                            <a:ea typeface="Source Sans Pro"/>
+                          </a:rPr>
+                          <m:t>𝐺</m:t>
+                        </m:r>
+                      </m:sub>
+                    </m:sSub>
+                  </m:oMath>
+                </a14:m>
+                <a:r>
+                  <a:rPr lang="en-US" sz="2400" dirty="0">
+                    <a:latin typeface="Source Sans Pro"/>
+                    <a:ea typeface="Source Sans Pro"/>
+                  </a:rPr>
+                  <a:t> captures whether or not a given constraint in </a:t>
+                </a:r>
+                <a14:m>
+                  <m:oMath xmlns:m="http://schemas.openxmlformats.org/officeDocument/2006/math">
+                    <m:r>
+                      <a:rPr lang="en-US" sz="2400" i="1" dirty="0" smtClean="0">
+                        <a:solidFill>
+                          <a:schemeClr val="tx2">
+                            <a:lumMod val="75000"/>
+                            <a:lumOff val="25000"/>
+                          </a:schemeClr>
+                        </a:solidFill>
+                        <a:latin typeface="Cambria Math" panose="02040503050406030204" pitchFamily="18" charset="0"/>
+                        <a:ea typeface="Source Sans Pro"/>
+                      </a:rPr>
+                      <m:t>𝐺</m:t>
+                    </m:r>
+                  </m:oMath>
+                </a14:m>
+                <a:r>
+                  <a:rPr lang="en-US" sz="2400" dirty="0">
+                    <a:latin typeface="Source Sans Pro"/>
+                    <a:ea typeface="Source Sans Pro"/>
+                  </a:rPr>
+                  <a:t> is satisfied by a given AST</a:t>
+                </a:r>
+              </a:p>
+            </p:txBody>
+          </p:sp>
+        </mc:Choice>
+        <mc:Fallback>
+          <p:sp>
+            <p:nvSpPr>
+              <p:cNvPr id="7" name="Content Placeholder 2">
+                <a:extLst>
+                  <a:ext uri="{FF2B5EF4-FFF2-40B4-BE49-F238E27FC236}">
+                    <a16:creationId xmlns:a16="http://schemas.microsoft.com/office/drawing/2014/main" id="{882EDB95-E817-BDE6-588D-14DDBC93F98B}"/>
+                  </a:ext>
+                </a:extLst>
+              </p:cNvPr>
+              <p:cNvSpPr>
+                <a:spLocks noGrp="1" noRot="1" noChangeAspect="1" noMove="1" noResize="1" noEditPoints="1" noAdjustHandles="1" noChangeArrowheads="1" noChangeShapeType="1" noTextEdit="1"/>
+              </p:cNvSpPr>
+              <p:nvPr>
+                <p:ph idx="1"/>
+              </p:nvPr>
+            </p:nvSpPr>
+            <p:spPr>
+              <a:xfrm>
+                <a:off x="838200" y="1787874"/>
+                <a:ext cx="10402124" cy="5070126"/>
+              </a:xfrm>
+              <a:blipFill>
+                <a:blip r:embed="rId2"/>
+                <a:stretch>
+                  <a:fillRect l="-976" t="-1750"/>
+                </a:stretch>
+              </a:blipFill>
+            </p:spPr>
+            <p:txBody>
+              <a:bodyPr/>
+              <a:lstStyle/>
+              <a:p>
+                <a:r>
+                  <a:rPr lang="en-US">
+                    <a:noFill/>
+                  </a:rPr>
+                  <a:t> </a:t>
+                </a:r>
+              </a:p>
+            </p:txBody>
+          </p:sp>
+        </mc:Fallback>
+      </mc:AlternateContent>
+      <p:pic>
+        <p:nvPicPr>
+          <p:cNvPr id="5" name="Picture 4" descr="A close-up of a number&#10;&#10;Description automatically generated">
+            <a:extLst>
+              <a:ext uri="{FF2B5EF4-FFF2-40B4-BE49-F238E27FC236}">
+                <a16:creationId xmlns:a16="http://schemas.microsoft.com/office/drawing/2014/main" id="{F61C4BF5-5228-2343-A7D1-E52C32D30DC4}"/>
+              </a:ext>
+            </a:extLst>
+          </p:cNvPr>
+          <p:cNvPicPr>
+            <a:picLocks noChangeAspect="1"/>
+          </p:cNvPicPr>
+          <p:nvPr/>
+        </p:nvPicPr>
+        <p:blipFill>
+          <a:blip r:embed="rId3">
+            <a:extLst>
+              <a:ext uri="{28A0092B-C50C-407E-A947-70E740481C1C}">
+                <a14:useLocalDpi xmlns:a14="http://schemas.microsoft.com/office/drawing/2010/main" val="0"/>
+              </a:ext>
+            </a:extLst>
+          </a:blip>
+          <a:stretch>
+            <a:fillRect/>
+          </a:stretch>
+        </p:blipFill>
+        <p:spPr>
+          <a:xfrm>
+            <a:off x="2209593" y="2643648"/>
+            <a:ext cx="7772400" cy="3182982"/>
+          </a:xfrm>
+          <a:prstGeom prst="rect">
+            <a:avLst/>
+          </a:prstGeom>
+        </p:spPr>
+      </p:pic>
+    </p:spTree>
+    <p:extLst>
+      <p:ext uri="{BB962C8B-B14F-4D97-AF65-F5344CB8AC3E}">
+        <p14:creationId xmlns:p14="http://schemas.microsoft.com/office/powerpoint/2010/main" val="3914240326"/>
+      </p:ext>
+    </p:extLst>
+  </p:cSld>
+  <p:clrMapOvr>
+    <a:masterClrMapping/>
+  </p:clrMapOvr>
+</p:sld>
+</file>
+
+<file path=ppt/slides/slide59.xml><?xml version="1.0" encoding="utf-8"?>
+<p:sld xmlns:a="http://schemas.openxmlformats.org/drawingml/2006/main" xmlns:r="http://schemas.openxmlformats.org/officeDocument/2006/relationships" xmlns:p="http://schemas.openxmlformats.org/presentationml/2006/main">
+  <p:cSld>
+    <p:spTree>
+      <p:nvGrpSpPr>
+        <p:cNvPr id="1" name="">
+          <a:extLst>
+            <a:ext uri="{FF2B5EF4-FFF2-40B4-BE49-F238E27FC236}">
+              <a16:creationId xmlns:a16="http://schemas.microsoft.com/office/drawing/2014/main" id="{EBBBF837-3478-AD04-BD2B-132A90BAE8DF}"/>
+            </a:ext>
+          </a:extLst>
+        </p:cNvPr>
+        <p:cNvGrpSpPr/>
+        <p:nvPr/>
+      </p:nvGrpSpPr>
+      <p:grpSpPr>
+        <a:xfrm>
+          <a:off x="0" y="0"/>
+          <a:ext cx="0" cy="0"/>
+          <a:chOff x="0" y="0"/>
+          <a:chExt cx="0" cy="0"/>
+        </a:xfrm>
+      </p:grpSpPr>
+      <mc:AlternateContent xmlns:mc="http://schemas.openxmlformats.org/markup-compatibility/2006">
+        <mc:Choice xmlns:a14="http://schemas.microsoft.com/office/drawing/2010/main" Requires="a14">
+          <p:sp>
+            <p:nvSpPr>
+              <p:cNvPr id="2" name="Title 1">
+                <a:extLst>
+                  <a:ext uri="{FF2B5EF4-FFF2-40B4-BE49-F238E27FC236}">
+                    <a16:creationId xmlns:a16="http://schemas.microsoft.com/office/drawing/2014/main" id="{B3B9F69A-6D95-337C-7195-5237D2D26DA8}"/>
+                  </a:ext>
+                </a:extLst>
+              </p:cNvPr>
+              <p:cNvSpPr>
+                <a:spLocks noGrp="1"/>
+              </p:cNvSpPr>
+              <p:nvPr>
+                <p:ph type="title"/>
+              </p:nvPr>
+            </p:nvSpPr>
+            <p:spPr/>
+            <p:txBody>
+              <a:bodyPr>
+                <a:normAutofit/>
+              </a:bodyPr>
+              <a:lstStyle/>
+              <a:p>
+                <a:r>
+                  <a:rPr lang="en-US" sz="3600" dirty="0">
+                    <a:solidFill>
+                      <a:schemeClr val="tx2">
+                        <a:lumMod val="76000"/>
+                        <a:lumOff val="24000"/>
+                      </a:schemeClr>
+                    </a:solidFill>
+                    <a:latin typeface="Source Sans Pro"/>
+                    <a:ea typeface="Source Sans Pro"/>
+                  </a:rPr>
+                  <a:t>Semantics: Denotation of </a:t>
+                </a:r>
+                <a14:m>
+                  <m:oMath xmlns:m="http://schemas.openxmlformats.org/officeDocument/2006/math">
+                    <m:r>
+                      <a:rPr lang="en-US" sz="3600" i="1" dirty="0" smtClean="0">
+                        <a:solidFill>
+                          <a:schemeClr val="tx2">
+                            <a:lumMod val="76000"/>
+                            <a:lumOff val="24000"/>
+                          </a:schemeClr>
+                        </a:solidFill>
+                        <a:latin typeface="Cambria Math" panose="02040503050406030204" pitchFamily="18" charset="0"/>
+                        <a:ea typeface="Source Sans Pro"/>
+                      </a:rPr>
+                      <m:t>𝐺</m:t>
+                    </m:r>
+                  </m:oMath>
+                </a14:m>
+                <a:endParaRPr lang="en-US" sz="3600" dirty="0"/>
+              </a:p>
+            </p:txBody>
+          </p:sp>
+        </mc:Choice>
+        <mc:Fallback>
+          <p:sp>
+            <p:nvSpPr>
+              <p:cNvPr id="2" name="Title 1">
+                <a:extLst>
+                  <a:ext uri="{FF2B5EF4-FFF2-40B4-BE49-F238E27FC236}">
+                    <a16:creationId xmlns:a16="http://schemas.microsoft.com/office/drawing/2014/main" id="{B3B9F69A-6D95-337C-7195-5237D2D26DA8}"/>
+                  </a:ext>
+                </a:extLst>
+              </p:cNvPr>
+              <p:cNvSpPr>
+                <a:spLocks noGrp="1" noRot="1" noChangeAspect="1" noMove="1" noResize="1" noEditPoints="1" noAdjustHandles="1" noChangeArrowheads="1" noChangeShapeType="1" noTextEdit="1"/>
+              </p:cNvSpPr>
+              <p:nvPr>
+                <p:ph type="title"/>
+              </p:nvPr>
+            </p:nvSpPr>
+            <p:spPr>
+              <a:blipFill>
+                <a:blip r:embed="rId2"/>
+                <a:stretch>
+                  <a:fillRect l="-1809"/>
+                </a:stretch>
+              </a:blipFill>
+            </p:spPr>
+            <p:txBody>
+              <a:bodyPr/>
+              <a:lstStyle/>
+              <a:p>
+                <a:r>
+                  <a:rPr lang="en-US">
+                    <a:noFill/>
+                  </a:rPr>
+                  <a:t> </a:t>
+                </a:r>
+              </a:p>
+            </p:txBody>
+          </p:sp>
+        </mc:Fallback>
+      </mc:AlternateContent>
+      <p:sp>
+        <p:nvSpPr>
+          <p:cNvPr id="4" name="Rectangle 3">
+            <a:extLst>
+              <a:ext uri="{FF2B5EF4-FFF2-40B4-BE49-F238E27FC236}">
+                <a16:creationId xmlns:a16="http://schemas.microsoft.com/office/drawing/2014/main" id="{0EF6A444-A5CF-77BC-EE8B-EE44E5F16D15}"/>
+              </a:ext>
+            </a:extLst>
+          </p:cNvPr>
+          <p:cNvSpPr/>
+          <p:nvPr/>
+        </p:nvSpPr>
+        <p:spPr>
+          <a:xfrm>
+            <a:off x="951263" y="1413082"/>
+            <a:ext cx="10289061" cy="104734"/>
+          </a:xfrm>
+          <a:prstGeom prst="rect">
+            <a:avLst/>
+          </a:prstGeom>
+          <a:solidFill>
+            <a:schemeClr val="tx2">
+              <a:lumMod val="75000"/>
+              <a:lumOff val="25000"/>
+            </a:schemeClr>
+          </a:solidFill>
+          <a:ln>
+            <a:noFill/>
+          </a:ln>
+        </p:spPr>
+        <p:style>
+          <a:lnRef idx="2">
+            <a:schemeClr val="accent1">
+              <a:shade val="15000"/>
+            </a:schemeClr>
+          </a:lnRef>
+          <a:fillRef idx="1">
+            <a:schemeClr val="accent1"/>
+          </a:fillRef>
+          <a:effectRef idx="0">
+            <a:schemeClr val="accent1"/>
+          </a:effectRef>
+          <a:fontRef idx="minor">
+            <a:schemeClr val="lt1"/>
+          </a:fontRef>
+        </p:style>
+        <p:txBody>
+          <a:bodyPr rtlCol="0" anchor="ctr"/>
+          <a:lstStyle/>
+          <a:p>
+            <a:pPr algn="ctr"/>
+            <a:endParaRPr lang="en-US"/>
+          </a:p>
+        </p:txBody>
+      </p:sp>
+      <mc:AlternateContent xmlns:mc="http://schemas.openxmlformats.org/markup-compatibility/2006">
+        <mc:Choice xmlns:a14="http://schemas.microsoft.com/office/drawing/2010/main" Requires="a14">
+          <p:sp>
+            <p:nvSpPr>
+              <p:cNvPr id="7" name="Content Placeholder 2">
+                <a:extLst>
+                  <a:ext uri="{FF2B5EF4-FFF2-40B4-BE49-F238E27FC236}">
+                    <a16:creationId xmlns:a16="http://schemas.microsoft.com/office/drawing/2014/main" id="{882EDB95-E817-BDE6-588D-14DDBC93F98B}"/>
+                  </a:ext>
+                </a:extLst>
+              </p:cNvPr>
+              <p:cNvSpPr>
+                <a:spLocks noGrp="1"/>
+              </p:cNvSpPr>
+              <p:nvPr>
+                <p:ph idx="1"/>
+              </p:nvPr>
+            </p:nvSpPr>
+            <p:spPr>
+              <a:xfrm>
+                <a:off x="838200" y="1787874"/>
+                <a:ext cx="10402124" cy="5070126"/>
+              </a:xfrm>
+            </p:spPr>
+            <p:txBody>
+              <a:bodyPr vert="horz" lIns="91440" tIns="45720" rIns="91440" bIns="45720" rtlCol="0" anchor="t">
+                <a:normAutofit/>
+              </a:bodyPr>
+              <a:lstStyle/>
+              <a:p>
+                <a:pPr marL="0" indent="0">
+                  <a:buNone/>
+                </a:pPr>
+                <a:r>
+                  <a:rPr lang="en-US" sz="2400" dirty="0">
+                    <a:latin typeface="Source Sans Pro"/>
+                    <a:ea typeface="Source Sans Pro"/>
+                  </a:rPr>
+                  <a:t>Semantics of a </a:t>
+                </a:r>
+                <a:r>
+                  <a:rPr lang="en-US" sz="2400" dirty="0">
+                    <a:latin typeface="Book Antiqua" panose="02040602050305030304" pitchFamily="18" charset="0"/>
+                    <a:ea typeface="Source Sans Pro"/>
+                  </a:rPr>
+                  <a:t>Goblin</a:t>
+                </a:r>
+                <a:r>
+                  <a:rPr lang="en-US" sz="2400" dirty="0">
+                    <a:latin typeface="Source Sans Pro"/>
+                    <a:ea typeface="Source Sans Pro"/>
+                  </a:rPr>
+                  <a:t> input </a:t>
+                </a:r>
+                <a14:m>
+                  <m:oMath xmlns:m="http://schemas.openxmlformats.org/officeDocument/2006/math">
+                    <m:r>
+                      <a:rPr lang="en-US" sz="2400" i="1" dirty="0" smtClean="0">
+                        <a:solidFill>
+                          <a:schemeClr val="tx2">
+                            <a:lumMod val="75000"/>
+                            <a:lumOff val="25000"/>
+                          </a:schemeClr>
+                        </a:solidFill>
+                        <a:latin typeface="Cambria Math" panose="02040503050406030204" pitchFamily="18" charset="0"/>
+                        <a:ea typeface="Source Sans Pro"/>
+                      </a:rPr>
+                      <m:t>𝐺</m:t>
+                    </m:r>
+                  </m:oMath>
+                </a14:m>
+                <a:r>
+                  <a:rPr lang="en-US" sz="2400" dirty="0">
+                    <a:latin typeface="Source Sans Pro"/>
+                    <a:ea typeface="Source Sans Pro"/>
+                  </a:rPr>
+                  <a:t> is the set of syntactically valid ASTs which satisfy all the constraints</a:t>
+                </a:r>
+              </a:p>
+            </p:txBody>
+          </p:sp>
+        </mc:Choice>
+        <mc:Fallback>
+          <p:sp>
+            <p:nvSpPr>
+              <p:cNvPr id="7" name="Content Placeholder 2">
+                <a:extLst>
+                  <a:ext uri="{FF2B5EF4-FFF2-40B4-BE49-F238E27FC236}">
+                    <a16:creationId xmlns:a16="http://schemas.microsoft.com/office/drawing/2014/main" id="{882EDB95-E817-BDE6-588D-14DDBC93F98B}"/>
+                  </a:ext>
+                </a:extLst>
+              </p:cNvPr>
+              <p:cNvSpPr>
+                <a:spLocks noGrp="1" noRot="1" noChangeAspect="1" noMove="1" noResize="1" noEditPoints="1" noAdjustHandles="1" noChangeArrowheads="1" noChangeShapeType="1" noTextEdit="1"/>
+              </p:cNvSpPr>
+              <p:nvPr>
+                <p:ph idx="1"/>
+              </p:nvPr>
+            </p:nvSpPr>
+            <p:spPr>
+              <a:xfrm>
+                <a:off x="838200" y="1787874"/>
+                <a:ext cx="10402124" cy="5070126"/>
+              </a:xfrm>
+              <a:blipFill>
+                <a:blip r:embed="rId3"/>
+                <a:stretch>
+                  <a:fillRect l="-976" t="-1750"/>
+                </a:stretch>
+              </a:blipFill>
+            </p:spPr>
+            <p:txBody>
+              <a:bodyPr/>
+              <a:lstStyle/>
+              <a:p>
+                <a:r>
+                  <a:rPr lang="en-US">
+                    <a:noFill/>
+                  </a:rPr>
+                  <a:t> </a:t>
+                </a:r>
+              </a:p>
+            </p:txBody>
+          </p:sp>
+        </mc:Fallback>
+      </mc:AlternateContent>
+      <p:pic>
+        <p:nvPicPr>
+          <p:cNvPr id="6" name="Picture 5" descr="A close-up of a word&#10;&#10;Description automatically generated">
+            <a:extLst>
+              <a:ext uri="{FF2B5EF4-FFF2-40B4-BE49-F238E27FC236}">
+                <a16:creationId xmlns:a16="http://schemas.microsoft.com/office/drawing/2014/main" id="{1BB3D5EE-0013-1762-5D92-753C770981A7}"/>
+              </a:ext>
+            </a:extLst>
+          </p:cNvPr>
+          <p:cNvPicPr>
+            <a:picLocks noChangeAspect="1"/>
+          </p:cNvPicPr>
+          <p:nvPr/>
+        </p:nvPicPr>
+        <p:blipFill>
+          <a:blip r:embed="rId4">
+            <a:extLst>
+              <a:ext uri="{28A0092B-C50C-407E-A947-70E740481C1C}">
+                <a14:useLocalDpi xmlns:a14="http://schemas.microsoft.com/office/drawing/2010/main" val="0"/>
+              </a:ext>
+            </a:extLst>
+          </a:blip>
+          <a:stretch>
+            <a:fillRect/>
+          </a:stretch>
+        </p:blipFill>
+        <p:spPr>
+          <a:xfrm>
+            <a:off x="1825440" y="3195879"/>
+            <a:ext cx="8541119" cy="1258425"/>
+          </a:xfrm>
+          <a:prstGeom prst="rect">
+            <a:avLst/>
+          </a:prstGeom>
+        </p:spPr>
+      </p:pic>
+    </p:spTree>
+    <p:extLst>
+      <p:ext uri="{BB962C8B-B14F-4D97-AF65-F5344CB8AC3E}">
+        <p14:creationId xmlns:p14="http://schemas.microsoft.com/office/powerpoint/2010/main" val="4160351002"/>
       </p:ext>
     </p:extLst>
   </p:cSld>
@@ -31285,6 +33127,412 @@
       <p:bldP spid="3" grpId="0" uiExpand="1" build="p"/>
     </p:bldLst>
   </p:timing>
+</p:sld>
+</file>
+
+<file path=ppt/slides/slide60.xml><?xml version="1.0" encoding="utf-8"?>
+<p:sld xmlns:a="http://schemas.openxmlformats.org/drawingml/2006/main" xmlns:r="http://schemas.openxmlformats.org/officeDocument/2006/relationships" xmlns:p="http://schemas.openxmlformats.org/presentationml/2006/main">
+  <p:cSld>
+    <p:spTree>
+      <p:nvGrpSpPr>
+        <p:cNvPr id="1" name="">
+          <a:extLst>
+            <a:ext uri="{FF2B5EF4-FFF2-40B4-BE49-F238E27FC236}">
+              <a16:creationId xmlns:a16="http://schemas.microsoft.com/office/drawing/2014/main" id="{EBBBF837-3478-AD04-BD2B-132A90BAE8DF}"/>
+            </a:ext>
+          </a:extLst>
+        </p:cNvPr>
+        <p:cNvGrpSpPr/>
+        <p:nvPr/>
+      </p:nvGrpSpPr>
+      <p:grpSpPr>
+        <a:xfrm>
+          <a:off x="0" y="0"/>
+          <a:ext cx="0" cy="0"/>
+          <a:chOff x="0" y="0"/>
+          <a:chExt cx="0" cy="0"/>
+        </a:xfrm>
+      </p:grpSpPr>
+      <p:sp>
+        <p:nvSpPr>
+          <p:cNvPr id="2" name="Title 1">
+            <a:extLst>
+              <a:ext uri="{FF2B5EF4-FFF2-40B4-BE49-F238E27FC236}">
+                <a16:creationId xmlns:a16="http://schemas.microsoft.com/office/drawing/2014/main" id="{B3B9F69A-6D95-337C-7195-5237D2D26DA8}"/>
+              </a:ext>
+            </a:extLst>
+          </p:cNvPr>
+          <p:cNvSpPr>
+            <a:spLocks noGrp="1"/>
+          </p:cNvSpPr>
+          <p:nvPr>
+            <p:ph type="title"/>
+          </p:nvPr>
+        </p:nvSpPr>
+        <p:spPr/>
+        <p:txBody>
+          <a:bodyPr>
+            <a:normAutofit/>
+          </a:bodyPr>
+          <a:lstStyle/>
+          <a:p>
+            <a:r>
+              <a:rPr lang="en-US" sz="3600" dirty="0">
+                <a:solidFill>
+                  <a:schemeClr val="tx2">
+                    <a:lumMod val="76000"/>
+                    <a:lumOff val="24000"/>
+                  </a:schemeClr>
+                </a:solidFill>
+                <a:latin typeface="Source Sans Pro"/>
+                <a:ea typeface="Source Sans Pro"/>
+              </a:rPr>
+              <a:t>Calculus</a:t>
+            </a:r>
+            <a:endParaRPr lang="en-US" sz="3600" dirty="0"/>
+          </a:p>
+        </p:txBody>
+      </p:sp>
+      <p:sp>
+        <p:nvSpPr>
+          <p:cNvPr id="4" name="Rectangle 3">
+            <a:extLst>
+              <a:ext uri="{FF2B5EF4-FFF2-40B4-BE49-F238E27FC236}">
+                <a16:creationId xmlns:a16="http://schemas.microsoft.com/office/drawing/2014/main" id="{0EF6A444-A5CF-77BC-EE8B-EE44E5F16D15}"/>
+              </a:ext>
+            </a:extLst>
+          </p:cNvPr>
+          <p:cNvSpPr/>
+          <p:nvPr/>
+        </p:nvSpPr>
+        <p:spPr>
+          <a:xfrm>
+            <a:off x="951263" y="1413082"/>
+            <a:ext cx="10289061" cy="104734"/>
+          </a:xfrm>
+          <a:prstGeom prst="rect">
+            <a:avLst/>
+          </a:prstGeom>
+          <a:solidFill>
+            <a:schemeClr val="tx2">
+              <a:lumMod val="75000"/>
+              <a:lumOff val="25000"/>
+            </a:schemeClr>
+          </a:solidFill>
+          <a:ln>
+            <a:noFill/>
+          </a:ln>
+        </p:spPr>
+        <p:style>
+          <a:lnRef idx="2">
+            <a:schemeClr val="accent1">
+              <a:shade val="15000"/>
+            </a:schemeClr>
+          </a:lnRef>
+          <a:fillRef idx="1">
+            <a:schemeClr val="accent1"/>
+          </a:fillRef>
+          <a:effectRef idx="0">
+            <a:schemeClr val="accent1"/>
+          </a:effectRef>
+          <a:fontRef idx="minor">
+            <a:schemeClr val="lt1"/>
+          </a:fontRef>
+        </p:style>
+        <p:txBody>
+          <a:bodyPr rtlCol="0" anchor="ctr"/>
+          <a:lstStyle/>
+          <a:p>
+            <a:pPr algn="ctr"/>
+            <a:endParaRPr lang="en-US"/>
+          </a:p>
+        </p:txBody>
+      </p:sp>
+      <p:sp>
+        <p:nvSpPr>
+          <p:cNvPr id="7" name="Content Placeholder 2">
+            <a:extLst>
+              <a:ext uri="{FF2B5EF4-FFF2-40B4-BE49-F238E27FC236}">
+                <a16:creationId xmlns:a16="http://schemas.microsoft.com/office/drawing/2014/main" id="{882EDB95-E817-BDE6-588D-14DDBC93F98B}"/>
+              </a:ext>
+            </a:extLst>
+          </p:cNvPr>
+          <p:cNvSpPr>
+            <a:spLocks noGrp="1"/>
+          </p:cNvSpPr>
+          <p:nvPr>
+            <p:ph idx="1"/>
+          </p:nvPr>
+        </p:nvSpPr>
+        <p:spPr>
+          <a:xfrm>
+            <a:off x="838200" y="1787874"/>
+            <a:ext cx="10402124" cy="5070126"/>
+          </a:xfrm>
+        </p:spPr>
+        <p:txBody>
+          <a:bodyPr vert="horz" lIns="91440" tIns="45720" rIns="91440" bIns="45720" rtlCol="0" anchor="t">
+            <a:normAutofit/>
+          </a:bodyPr>
+          <a:lstStyle/>
+          <a:p>
+            <a:pPr marL="0" indent="0">
+              <a:buNone/>
+            </a:pPr>
+            <a:r>
+              <a:rPr lang="en-US" sz="2400" dirty="0">
+                <a:latin typeface="Source Sans Pro"/>
+                <a:ea typeface="Source Sans Pro"/>
+              </a:rPr>
+              <a:t>Can be conceptualized as </a:t>
+            </a:r>
+            <a:r>
+              <a:rPr lang="en-US" sz="2400" dirty="0">
+                <a:solidFill>
+                  <a:schemeClr val="accent6">
+                    <a:lumMod val="75000"/>
+                  </a:schemeClr>
+                </a:solidFill>
+                <a:latin typeface="Source Sans Pro"/>
+                <a:ea typeface="Source Sans Pro"/>
+              </a:rPr>
+              <a:t>guarded rewrite rules </a:t>
+            </a:r>
+            <a:r>
+              <a:rPr lang="en-US" sz="2400" dirty="0">
+                <a:latin typeface="Source Sans Pro"/>
+                <a:ea typeface="Source Sans Pro"/>
+              </a:rPr>
+              <a:t>on global state</a:t>
+            </a:r>
+          </a:p>
+          <a:p>
+            <a:pPr marL="0" indent="0">
+              <a:buNone/>
+            </a:pPr>
+            <a:r>
+              <a:rPr lang="en-US" sz="2400" dirty="0">
+                <a:latin typeface="Source Sans Pro"/>
+                <a:ea typeface="Source Sans Pro"/>
+              </a:rPr>
+              <a:t>Example rule expands a symbolic terminal </a:t>
+            </a:r>
+          </a:p>
+        </p:txBody>
+      </p:sp>
+      <p:pic>
+        <p:nvPicPr>
+          <p:cNvPr id="5" name="Picture 4" descr="A close-up of a math formula&#10;&#10;Description automatically generated">
+            <a:extLst>
+              <a:ext uri="{FF2B5EF4-FFF2-40B4-BE49-F238E27FC236}">
+                <a16:creationId xmlns:a16="http://schemas.microsoft.com/office/drawing/2014/main" id="{18B44BB8-4588-7EC4-F1E1-3185BAD3333F}"/>
+              </a:ext>
+            </a:extLst>
+          </p:cNvPr>
+          <p:cNvPicPr>
+            <a:picLocks noChangeAspect="1"/>
+          </p:cNvPicPr>
+          <p:nvPr/>
+        </p:nvPicPr>
+        <p:blipFill>
+          <a:blip r:embed="rId2">
+            <a:extLst>
+              <a:ext uri="{28A0092B-C50C-407E-A947-70E740481C1C}">
+                <a14:useLocalDpi xmlns:a14="http://schemas.microsoft.com/office/drawing/2010/main" val="0"/>
+              </a:ext>
+            </a:extLst>
+          </a:blip>
+          <a:stretch>
+            <a:fillRect/>
+          </a:stretch>
+        </p:blipFill>
+        <p:spPr>
+          <a:xfrm>
+            <a:off x="2209593" y="3350789"/>
+            <a:ext cx="7772400" cy="1288664"/>
+          </a:xfrm>
+          <a:prstGeom prst="rect">
+            <a:avLst/>
+          </a:prstGeom>
+        </p:spPr>
+      </p:pic>
+    </p:spTree>
+    <p:extLst>
+      <p:ext uri="{BB962C8B-B14F-4D97-AF65-F5344CB8AC3E}">
+        <p14:creationId xmlns:p14="http://schemas.microsoft.com/office/powerpoint/2010/main" val="509565453"/>
+      </p:ext>
+    </p:extLst>
+  </p:cSld>
+  <p:clrMapOvr>
+    <a:masterClrMapping/>
+  </p:clrMapOvr>
+</p:sld>
+</file>
+
+<file path=ppt/slides/slide61.xml><?xml version="1.0" encoding="utf-8"?>
+<p:sld xmlns:a="http://schemas.openxmlformats.org/drawingml/2006/main" xmlns:r="http://schemas.openxmlformats.org/officeDocument/2006/relationships" xmlns:p="http://schemas.openxmlformats.org/presentationml/2006/main">
+  <p:cSld>
+    <p:spTree>
+      <p:nvGrpSpPr>
+        <p:cNvPr id="1" name="">
+          <a:extLst>
+            <a:ext uri="{FF2B5EF4-FFF2-40B4-BE49-F238E27FC236}">
+              <a16:creationId xmlns:a16="http://schemas.microsoft.com/office/drawing/2014/main" id="{EBBBF837-3478-AD04-BD2B-132A90BAE8DF}"/>
+            </a:ext>
+          </a:extLst>
+        </p:cNvPr>
+        <p:cNvGrpSpPr/>
+        <p:nvPr/>
+      </p:nvGrpSpPr>
+      <p:grpSpPr>
+        <a:xfrm>
+          <a:off x="0" y="0"/>
+          <a:ext cx="0" cy="0"/>
+          <a:chOff x="0" y="0"/>
+          <a:chExt cx="0" cy="0"/>
+        </a:xfrm>
+      </p:grpSpPr>
+      <p:sp>
+        <p:nvSpPr>
+          <p:cNvPr id="2" name="Title 1">
+            <a:extLst>
+              <a:ext uri="{FF2B5EF4-FFF2-40B4-BE49-F238E27FC236}">
+                <a16:creationId xmlns:a16="http://schemas.microsoft.com/office/drawing/2014/main" id="{B3B9F69A-6D95-337C-7195-5237D2D26DA8}"/>
+              </a:ext>
+            </a:extLst>
+          </p:cNvPr>
+          <p:cNvSpPr>
+            <a:spLocks noGrp="1"/>
+          </p:cNvSpPr>
+          <p:nvPr>
+            <p:ph type="title"/>
+          </p:nvPr>
+        </p:nvSpPr>
+        <p:spPr/>
+        <p:txBody>
+          <a:bodyPr>
+            <a:normAutofit/>
+          </a:bodyPr>
+          <a:lstStyle/>
+          <a:p>
+            <a:r>
+              <a:rPr lang="en-US" sz="3600" dirty="0">
+                <a:solidFill>
+                  <a:schemeClr val="tx2">
+                    <a:lumMod val="76000"/>
+                    <a:lumOff val="24000"/>
+                  </a:schemeClr>
+                </a:solidFill>
+                <a:latin typeface="Source Sans Pro"/>
+                <a:ea typeface="Source Sans Pro"/>
+              </a:rPr>
+              <a:t>Search Algorithm Pseudocode</a:t>
+            </a:r>
+            <a:endParaRPr lang="en-US" sz="3600" dirty="0"/>
+          </a:p>
+        </p:txBody>
+      </p:sp>
+      <p:sp>
+        <p:nvSpPr>
+          <p:cNvPr id="4" name="Rectangle 3">
+            <a:extLst>
+              <a:ext uri="{FF2B5EF4-FFF2-40B4-BE49-F238E27FC236}">
+                <a16:creationId xmlns:a16="http://schemas.microsoft.com/office/drawing/2014/main" id="{0EF6A444-A5CF-77BC-EE8B-EE44E5F16D15}"/>
+              </a:ext>
+            </a:extLst>
+          </p:cNvPr>
+          <p:cNvSpPr/>
+          <p:nvPr/>
+        </p:nvSpPr>
+        <p:spPr>
+          <a:xfrm>
+            <a:off x="951263" y="1413082"/>
+            <a:ext cx="10289061" cy="104734"/>
+          </a:xfrm>
+          <a:prstGeom prst="rect">
+            <a:avLst/>
+          </a:prstGeom>
+          <a:solidFill>
+            <a:schemeClr val="tx2">
+              <a:lumMod val="75000"/>
+              <a:lumOff val="25000"/>
+            </a:schemeClr>
+          </a:solidFill>
+          <a:ln>
+            <a:noFill/>
+          </a:ln>
+        </p:spPr>
+        <p:style>
+          <a:lnRef idx="2">
+            <a:schemeClr val="accent1">
+              <a:shade val="15000"/>
+            </a:schemeClr>
+          </a:lnRef>
+          <a:fillRef idx="1">
+            <a:schemeClr val="accent1"/>
+          </a:fillRef>
+          <a:effectRef idx="0">
+            <a:schemeClr val="accent1"/>
+          </a:effectRef>
+          <a:fontRef idx="minor">
+            <a:schemeClr val="lt1"/>
+          </a:fontRef>
+        </p:style>
+        <p:txBody>
+          <a:bodyPr rtlCol="0" anchor="ctr"/>
+          <a:lstStyle/>
+          <a:p>
+            <a:pPr algn="ctr"/>
+            <a:endParaRPr lang="en-US"/>
+          </a:p>
+        </p:txBody>
+      </p:sp>
+      <p:pic>
+        <p:nvPicPr>
+          <p:cNvPr id="6" name="Picture 5" descr="A paper with text and numbers&#10;&#10;Description automatically generated with medium confidence">
+            <a:extLst>
+              <a:ext uri="{FF2B5EF4-FFF2-40B4-BE49-F238E27FC236}">
+                <a16:creationId xmlns:a16="http://schemas.microsoft.com/office/drawing/2014/main" id="{692976BE-59BF-0956-BED3-4215CE8E4443}"/>
+              </a:ext>
+            </a:extLst>
+          </p:cNvPr>
+          <p:cNvPicPr>
+            <a:picLocks noChangeAspect="1"/>
+          </p:cNvPicPr>
+          <p:nvPr/>
+        </p:nvPicPr>
+        <p:blipFill>
+          <a:blip r:embed="rId2">
+            <a:extLst>
+              <a:ext uri="{28A0092B-C50C-407E-A947-70E740481C1C}">
+                <a14:useLocalDpi xmlns:a14="http://schemas.microsoft.com/office/drawing/2010/main" val="0"/>
+              </a:ext>
+            </a:extLst>
+          </a:blip>
+          <a:stretch>
+            <a:fillRect/>
+          </a:stretch>
+        </p:blipFill>
+        <p:spPr>
+          <a:xfrm>
+            <a:off x="951264" y="1526869"/>
+            <a:ext cx="3765592" cy="5293835"/>
+          </a:xfrm>
+          <a:prstGeom prst="rect">
+            <a:avLst/>
+          </a:prstGeom>
+        </p:spPr>
+      </p:pic>
+    </p:spTree>
+    <p:extLst>
+      <p:ext uri="{BB962C8B-B14F-4D97-AF65-F5344CB8AC3E}">
+        <p14:creationId xmlns:p14="http://schemas.microsoft.com/office/powerpoint/2010/main" val="521590988"/>
+      </p:ext>
+    </p:extLst>
+  </p:cSld>
+  <p:clrMapOvr>
+    <a:masterClrMapping/>
+  </p:clrMapOvr>
 </p:sld>
 </file>
 
